--- a/.github/assets.pptx
+++ b/.github/assets.pptx
@@ -5,7 +5,7 @@
     <p:sldMasterId id="2147483648" r:id="rId1"/>
   </p:sldMasterIdLst>
   <p:notesMasterIdLst>
-    <p:notesMasterId r:id="rId28"/>
+    <p:notesMasterId r:id="rId29"/>
   </p:notesMasterIdLst>
   <p:sldIdLst>
     <p:sldId id="256" r:id="rId2"/>
@@ -34,6 +34,7 @@
     <p:sldId id="271" r:id="rId25"/>
     <p:sldId id="273" r:id="rId26"/>
     <p:sldId id="281" r:id="rId27"/>
+    <p:sldId id="282" r:id="rId28"/>
   </p:sldIdLst>
   <p:sldSz cx="12192000" cy="6858000"/>
   <p:notesSz cx="6858000" cy="9144000"/>
@@ -132,6 +133,11 @@
       </a:defRPr>
     </a:lvl9pPr>
   </p:defaultTextStyle>
+  <p:extLst>
+    <p:ext uri="{EFAFB233-063F-42B5-8137-9DF3F51BA10A}">
+      <p15:sldGuideLst xmlns:p15="http://schemas.microsoft.com/office/powerpoint/2012/main"/>
+    </p:ext>
+  </p:extLst>
 </p:presentation>
 </file>
 
@@ -748,7 +754,7 @@
           <a:p>
             <a:fld id="{A526750A-26C5-4877-B081-A58D14358CD2}" type="datetimeFigureOut">
               <a:rPr lang="en-US" smtClean="0"/>
-              <a:t>8/2/2026</a:t>
+              <a:t>8/3/2026</a:t>
             </a:fld>
             <a:endParaRPr lang="en-US"/>
           </a:p>
@@ -1252,7 +1258,7 @@
           <a:p>
             <a:fld id="{2B9C4043-2A4D-4BD2-BAFC-8CCB15620BA0}" type="datetimeFigureOut">
               <a:rPr lang="en-US" smtClean="0"/>
-              <a:t>8/1/2026</a:t>
+              <a:t>8/3/2026</a:t>
             </a:fld>
             <a:endParaRPr lang="en-US"/>
           </a:p>
@@ -1450,7 +1456,7 @@
           <a:p>
             <a:fld id="{2B9C4043-2A4D-4BD2-BAFC-8CCB15620BA0}" type="datetimeFigureOut">
               <a:rPr lang="en-US" smtClean="0"/>
-              <a:t>8/1/2026</a:t>
+              <a:t>8/3/2026</a:t>
             </a:fld>
             <a:endParaRPr lang="en-US"/>
           </a:p>
@@ -1658,7 +1664,7 @@
           <a:p>
             <a:fld id="{2B9C4043-2A4D-4BD2-BAFC-8CCB15620BA0}" type="datetimeFigureOut">
               <a:rPr lang="en-US" smtClean="0"/>
-              <a:t>8/1/2026</a:t>
+              <a:t>8/3/2026</a:t>
             </a:fld>
             <a:endParaRPr lang="en-US"/>
           </a:p>
@@ -1856,7 +1862,7 @@
           <a:p>
             <a:fld id="{2B9C4043-2A4D-4BD2-BAFC-8CCB15620BA0}" type="datetimeFigureOut">
               <a:rPr lang="en-US" smtClean="0"/>
-              <a:t>8/1/2026</a:t>
+              <a:t>8/3/2026</a:t>
             </a:fld>
             <a:endParaRPr lang="en-US"/>
           </a:p>
@@ -2131,7 +2137,7 @@
           <a:p>
             <a:fld id="{2B9C4043-2A4D-4BD2-BAFC-8CCB15620BA0}" type="datetimeFigureOut">
               <a:rPr lang="en-US" smtClean="0"/>
-              <a:t>8/1/2026</a:t>
+              <a:t>8/3/2026</a:t>
             </a:fld>
             <a:endParaRPr lang="en-US"/>
           </a:p>
@@ -2396,7 +2402,7 @@
           <a:p>
             <a:fld id="{2B9C4043-2A4D-4BD2-BAFC-8CCB15620BA0}" type="datetimeFigureOut">
               <a:rPr lang="en-US" smtClean="0"/>
-              <a:t>8/1/2026</a:t>
+              <a:t>8/3/2026</a:t>
             </a:fld>
             <a:endParaRPr lang="en-US"/>
           </a:p>
@@ -2808,7 +2814,7 @@
           <a:p>
             <a:fld id="{2B9C4043-2A4D-4BD2-BAFC-8CCB15620BA0}" type="datetimeFigureOut">
               <a:rPr lang="en-US" smtClean="0"/>
-              <a:t>8/1/2026</a:t>
+              <a:t>8/3/2026</a:t>
             </a:fld>
             <a:endParaRPr lang="en-US"/>
           </a:p>
@@ -2949,7 +2955,7 @@
           <a:p>
             <a:fld id="{2B9C4043-2A4D-4BD2-BAFC-8CCB15620BA0}" type="datetimeFigureOut">
               <a:rPr lang="en-US" smtClean="0"/>
-              <a:t>8/1/2026</a:t>
+              <a:t>8/3/2026</a:t>
             </a:fld>
             <a:endParaRPr lang="en-US"/>
           </a:p>
@@ -3062,7 +3068,7 @@
           <a:p>
             <a:fld id="{2B9C4043-2A4D-4BD2-BAFC-8CCB15620BA0}" type="datetimeFigureOut">
               <a:rPr lang="en-US" smtClean="0"/>
-              <a:t>8/1/2026</a:t>
+              <a:t>8/3/2026</a:t>
             </a:fld>
             <a:endParaRPr lang="en-US"/>
           </a:p>
@@ -3373,7 +3379,7 @@
           <a:p>
             <a:fld id="{2B9C4043-2A4D-4BD2-BAFC-8CCB15620BA0}" type="datetimeFigureOut">
               <a:rPr lang="en-US" smtClean="0"/>
-              <a:t>8/1/2026</a:t>
+              <a:t>8/3/2026</a:t>
             </a:fld>
             <a:endParaRPr lang="en-US"/>
           </a:p>
@@ -3661,7 +3667,7 @@
           <a:p>
             <a:fld id="{2B9C4043-2A4D-4BD2-BAFC-8CCB15620BA0}" type="datetimeFigureOut">
               <a:rPr lang="en-US" smtClean="0"/>
-              <a:t>8/1/2026</a:t>
+              <a:t>8/3/2026</a:t>
             </a:fld>
             <a:endParaRPr lang="en-US"/>
           </a:p>
@@ -3902,7 +3908,7 @@
           <a:p>
             <a:fld id="{2B9C4043-2A4D-4BD2-BAFC-8CCB15620BA0}" type="datetimeFigureOut">
               <a:rPr lang="en-US" smtClean="0"/>
-              <a:t>8/1/2026</a:t>
+              <a:t>8/3/2026</a:t>
             </a:fld>
             <a:endParaRPr lang="en-US"/>
           </a:p>
@@ -5966,8 +5972,8 @@
           </a:effectLst>
         </p:spPr>
       </p:pic>
-      <mc:AlternateContent xmlns:mc="http://schemas.openxmlformats.org/markup-compatibility/2006">
-        <mc:Choice xmlns:p14="http://schemas.microsoft.com/office/powerpoint/2010/main" Requires="p14">
+      <mc:AlternateContent xmlns:mc="http://schemas.openxmlformats.org/markup-compatibility/2006" xmlns:p14="http://schemas.microsoft.com/office/powerpoint/2010/main">
+        <mc:Choice Requires="p14">
           <p:contentPart p14:bwMode="auto" r:id="rId18">
             <p14:nvContentPartPr>
               <p14:cNvPr id="151" name="Ink 150">
@@ -5986,7 +5992,7 @@
             </p14:xfrm>
           </p:contentPart>
         </mc:Choice>
-        <mc:Fallback>
+        <mc:Fallback xmlns="">
           <p:pic>
             <p:nvPicPr>
               <p:cNvPr id="151" name="Ink 150">
@@ -6017,8 +6023,8 @@
           </p:pic>
         </mc:Fallback>
       </mc:AlternateContent>
-      <mc:AlternateContent xmlns:mc="http://schemas.openxmlformats.org/markup-compatibility/2006">
-        <mc:Choice xmlns:p14="http://schemas.microsoft.com/office/powerpoint/2010/main" Requires="p14">
+      <mc:AlternateContent xmlns:mc="http://schemas.openxmlformats.org/markup-compatibility/2006" xmlns:p14="http://schemas.microsoft.com/office/powerpoint/2010/main">
+        <mc:Choice Requires="p14">
           <p:contentPart p14:bwMode="auto" r:id="rId20">
             <p14:nvContentPartPr>
               <p14:cNvPr id="154" name="Ink 153">
@@ -6037,7 +6043,7 @@
             </p14:xfrm>
           </p:contentPart>
         </mc:Choice>
-        <mc:Fallback>
+        <mc:Fallback xmlns="">
           <p:pic>
             <p:nvPicPr>
               <p:cNvPr id="154" name="Ink 153">
@@ -6068,8 +6074,8 @@
           </p:pic>
         </mc:Fallback>
       </mc:AlternateContent>
-      <mc:AlternateContent xmlns:mc="http://schemas.openxmlformats.org/markup-compatibility/2006">
-        <mc:Choice xmlns:p14="http://schemas.microsoft.com/office/powerpoint/2010/main" Requires="p14">
+      <mc:AlternateContent xmlns:mc="http://schemas.openxmlformats.org/markup-compatibility/2006" xmlns:p14="http://schemas.microsoft.com/office/powerpoint/2010/main">
+        <mc:Choice Requires="p14">
           <p:contentPart p14:bwMode="auto" r:id="rId22">
             <p14:nvContentPartPr>
               <p14:cNvPr id="157" name="Ink 156">
@@ -6088,7 +6094,7 @@
             </p14:xfrm>
           </p:contentPart>
         </mc:Choice>
-        <mc:Fallback>
+        <mc:Fallback xmlns="">
           <p:pic>
             <p:nvPicPr>
               <p:cNvPr id="157" name="Ink 156">
@@ -6119,8 +6125,8 @@
           </p:pic>
         </mc:Fallback>
       </mc:AlternateContent>
-      <mc:AlternateContent xmlns:mc="http://schemas.openxmlformats.org/markup-compatibility/2006">
-        <mc:Choice xmlns:p14="http://schemas.microsoft.com/office/powerpoint/2010/main" Requires="p14">
+      <mc:AlternateContent xmlns:mc="http://schemas.openxmlformats.org/markup-compatibility/2006" xmlns:p14="http://schemas.microsoft.com/office/powerpoint/2010/main">
+        <mc:Choice Requires="p14">
           <p:contentPart p14:bwMode="auto" r:id="rId24">
             <p14:nvContentPartPr>
               <p14:cNvPr id="158" name="Ink 157">
@@ -6139,7 +6145,7 @@
             </p14:xfrm>
           </p:contentPart>
         </mc:Choice>
-        <mc:Fallback>
+        <mc:Fallback xmlns="">
           <p:pic>
             <p:nvPicPr>
               <p:cNvPr id="158" name="Ink 157">
@@ -10484,7 +10490,7 @@
         </p:nvSpPr>
         <p:spPr>
           <a:xfrm>
-            <a:off x="1394691" y="1671782"/>
+            <a:off x="1405081" y="1611124"/>
             <a:ext cx="3722254" cy="3833091"/>
           </a:xfrm>
           <a:prstGeom prst="rect">
@@ -11287,8 +11293,8 @@
           </a:prstGeom>
         </p:spPr>
       </p:pic>
-      <mc:AlternateContent xmlns:mc="http://schemas.openxmlformats.org/markup-compatibility/2006">
-        <mc:Choice xmlns:p14="http://schemas.microsoft.com/office/powerpoint/2010/main" Requires="p14">
+      <mc:AlternateContent xmlns:mc="http://schemas.openxmlformats.org/markup-compatibility/2006" xmlns:p14="http://schemas.microsoft.com/office/powerpoint/2010/main">
+        <mc:Choice Requires="p14">
           <p:contentPart p14:bwMode="auto" r:id="rId4">
             <p14:nvContentPartPr>
               <p14:cNvPr id="13" name="Ink 12">
@@ -11307,7 +11313,7 @@
             </p14:xfrm>
           </p:contentPart>
         </mc:Choice>
-        <mc:Fallback>
+        <mc:Fallback xmlns="">
           <p:pic>
             <p:nvPicPr>
               <p:cNvPr id="13" name="Ink 12">
@@ -11338,8 +11344,8 @@
           </p:pic>
         </mc:Fallback>
       </mc:AlternateContent>
-      <mc:AlternateContent xmlns:mc="http://schemas.openxmlformats.org/markup-compatibility/2006">
-        <mc:Choice xmlns:p14="http://schemas.microsoft.com/office/powerpoint/2010/main" Requires="p14">
+      <mc:AlternateContent xmlns:mc="http://schemas.openxmlformats.org/markup-compatibility/2006" xmlns:p14="http://schemas.microsoft.com/office/powerpoint/2010/main">
+        <mc:Choice Requires="p14">
           <p:contentPart p14:bwMode="auto" r:id="rId6">
             <p14:nvContentPartPr>
               <p14:cNvPr id="60" name="Ink 59">
@@ -11358,7 +11364,7 @@
             </p14:xfrm>
           </p:contentPart>
         </mc:Choice>
-        <mc:Fallback>
+        <mc:Fallback xmlns="">
           <p:pic>
             <p:nvPicPr>
               <p:cNvPr id="60" name="Ink 59">
@@ -11389,8 +11395,8 @@
           </p:pic>
         </mc:Fallback>
       </mc:AlternateContent>
-      <mc:AlternateContent xmlns:mc="http://schemas.openxmlformats.org/markup-compatibility/2006">
-        <mc:Choice xmlns:p14="http://schemas.microsoft.com/office/powerpoint/2010/main" Requires="p14">
+      <mc:AlternateContent xmlns:mc="http://schemas.openxmlformats.org/markup-compatibility/2006" xmlns:p14="http://schemas.microsoft.com/office/powerpoint/2010/main">
+        <mc:Choice Requires="p14">
           <p:contentPart p14:bwMode="auto" r:id="rId8">
             <p14:nvContentPartPr>
               <p14:cNvPr id="61" name="Ink 60">
@@ -11409,7 +11415,7 @@
             </p14:xfrm>
           </p:contentPart>
         </mc:Choice>
-        <mc:Fallback>
+        <mc:Fallback xmlns="">
           <p:pic>
             <p:nvPicPr>
               <p:cNvPr id="61" name="Ink 60">
@@ -11440,8 +11446,8 @@
           </p:pic>
         </mc:Fallback>
       </mc:AlternateContent>
-      <mc:AlternateContent xmlns:mc="http://schemas.openxmlformats.org/markup-compatibility/2006">
-        <mc:Choice xmlns:p14="http://schemas.microsoft.com/office/powerpoint/2010/main" Requires="p14">
+      <mc:AlternateContent xmlns:mc="http://schemas.openxmlformats.org/markup-compatibility/2006" xmlns:p14="http://schemas.microsoft.com/office/powerpoint/2010/main">
+        <mc:Choice Requires="p14">
           <p:contentPart p14:bwMode="auto" r:id="rId10">
             <p14:nvContentPartPr>
               <p14:cNvPr id="76" name="Ink 75">
@@ -11460,7 +11466,7 @@
             </p14:xfrm>
           </p:contentPart>
         </mc:Choice>
-        <mc:Fallback>
+        <mc:Fallback xmlns="">
           <p:pic>
             <p:nvPicPr>
               <p:cNvPr id="76" name="Ink 75">
@@ -11491,8 +11497,8 @@
           </p:pic>
         </mc:Fallback>
       </mc:AlternateContent>
-      <mc:AlternateContent xmlns:mc="http://schemas.openxmlformats.org/markup-compatibility/2006">
-        <mc:Choice xmlns:p14="http://schemas.microsoft.com/office/powerpoint/2010/main" Requires="p14">
+      <mc:AlternateContent xmlns:mc="http://schemas.openxmlformats.org/markup-compatibility/2006" xmlns:p14="http://schemas.microsoft.com/office/powerpoint/2010/main">
+        <mc:Choice Requires="p14">
           <p:contentPart p14:bwMode="auto" r:id="rId12">
             <p14:nvContentPartPr>
               <p14:cNvPr id="79" name="Ink 78">
@@ -11511,7 +11517,7 @@
             </p14:xfrm>
           </p:contentPart>
         </mc:Choice>
-        <mc:Fallback>
+        <mc:Fallback xmlns="">
           <p:pic>
             <p:nvPicPr>
               <p:cNvPr id="79" name="Ink 78">
@@ -11542,8 +11548,8 @@
           </p:pic>
         </mc:Fallback>
       </mc:AlternateContent>
-      <mc:AlternateContent xmlns:mc="http://schemas.openxmlformats.org/markup-compatibility/2006">
-        <mc:Choice xmlns:p14="http://schemas.microsoft.com/office/powerpoint/2010/main" Requires="p14">
+      <mc:AlternateContent xmlns:mc="http://schemas.openxmlformats.org/markup-compatibility/2006" xmlns:p14="http://schemas.microsoft.com/office/powerpoint/2010/main">
+        <mc:Choice Requires="p14">
           <p:contentPart p14:bwMode="auto" r:id="rId14">
             <p14:nvContentPartPr>
               <p14:cNvPr id="82" name="Ink 81">
@@ -11562,7 +11568,7 @@
             </p14:xfrm>
           </p:contentPart>
         </mc:Choice>
-        <mc:Fallback>
+        <mc:Fallback xmlns="">
           <p:pic>
             <p:nvPicPr>
               <p:cNvPr id="82" name="Ink 81">
@@ -11593,8 +11599,8 @@
           </p:pic>
         </mc:Fallback>
       </mc:AlternateContent>
-      <mc:AlternateContent xmlns:mc="http://schemas.openxmlformats.org/markup-compatibility/2006">
-        <mc:Choice xmlns:p14="http://schemas.microsoft.com/office/powerpoint/2010/main" Requires="p14">
+      <mc:AlternateContent xmlns:mc="http://schemas.openxmlformats.org/markup-compatibility/2006" xmlns:p14="http://schemas.microsoft.com/office/powerpoint/2010/main">
+        <mc:Choice Requires="p14">
           <p:contentPart p14:bwMode="auto" r:id="rId16">
             <p14:nvContentPartPr>
               <p14:cNvPr id="91" name="Ink 90">
@@ -11613,7 +11619,7 @@
             </p14:xfrm>
           </p:contentPart>
         </mc:Choice>
-        <mc:Fallback>
+        <mc:Fallback xmlns="">
           <p:pic>
             <p:nvPicPr>
               <p:cNvPr id="91" name="Ink 90">
@@ -11644,8 +11650,8 @@
           </p:pic>
         </mc:Fallback>
       </mc:AlternateContent>
-      <mc:AlternateContent xmlns:mc="http://schemas.openxmlformats.org/markup-compatibility/2006">
-        <mc:Choice xmlns:p14="http://schemas.microsoft.com/office/powerpoint/2010/main" Requires="p14">
+      <mc:AlternateContent xmlns:mc="http://schemas.openxmlformats.org/markup-compatibility/2006" xmlns:p14="http://schemas.microsoft.com/office/powerpoint/2010/main">
+        <mc:Choice Requires="p14">
           <p:contentPart p14:bwMode="auto" r:id="rId18">
             <p14:nvContentPartPr>
               <p14:cNvPr id="94" name="Ink 93">
@@ -11664,7 +11670,7 @@
             </p14:xfrm>
           </p:contentPart>
         </mc:Choice>
-        <mc:Fallback>
+        <mc:Fallback xmlns="">
           <p:pic>
             <p:nvPicPr>
               <p:cNvPr id="94" name="Ink 93">
@@ -11715,8 +11721,8 @@
             <a:chExt cx="292320" cy="468360"/>
           </a:xfrm>
         </p:grpSpPr>
-        <mc:AlternateContent xmlns:mc="http://schemas.openxmlformats.org/markup-compatibility/2006">
-          <mc:Choice xmlns:p14="http://schemas.microsoft.com/office/powerpoint/2010/main" Requires="p14">
+        <mc:AlternateContent xmlns:mc="http://schemas.openxmlformats.org/markup-compatibility/2006" xmlns:p14="http://schemas.microsoft.com/office/powerpoint/2010/main">
+          <mc:Choice Requires="p14">
             <p:contentPart p14:bwMode="auto" r:id="rId20">
               <p14:nvContentPartPr>
                 <p14:cNvPr id="96" name="Ink 95">
@@ -11735,7 +11741,7 @@
               </p14:xfrm>
             </p:contentPart>
           </mc:Choice>
-          <mc:Fallback>
+          <mc:Fallback xmlns="">
             <p:pic>
               <p:nvPicPr>
                 <p:cNvPr id="96" name="Ink 95">
@@ -11766,8 +11772,8 @@
             </p:pic>
           </mc:Fallback>
         </mc:AlternateContent>
-        <mc:AlternateContent xmlns:mc="http://schemas.openxmlformats.org/markup-compatibility/2006">
-          <mc:Choice xmlns:p14="http://schemas.microsoft.com/office/powerpoint/2010/main" Requires="p14">
+        <mc:AlternateContent xmlns:mc="http://schemas.openxmlformats.org/markup-compatibility/2006" xmlns:p14="http://schemas.microsoft.com/office/powerpoint/2010/main">
+          <mc:Choice Requires="p14">
             <p:contentPart p14:bwMode="auto" r:id="rId22">
               <p14:nvContentPartPr>
                 <p14:cNvPr id="97" name="Ink 96">
@@ -11786,7 +11792,7 @@
               </p14:xfrm>
             </p:contentPart>
           </mc:Choice>
-          <mc:Fallback>
+          <mc:Fallback xmlns="">
             <p:pic>
               <p:nvPicPr>
                 <p:cNvPr id="97" name="Ink 96">
@@ -11817,8 +11823,8 @@
             </p:pic>
           </mc:Fallback>
         </mc:AlternateContent>
-        <mc:AlternateContent xmlns:mc="http://schemas.openxmlformats.org/markup-compatibility/2006">
-          <mc:Choice xmlns:p14="http://schemas.microsoft.com/office/powerpoint/2010/main" Requires="p14">
+        <mc:AlternateContent xmlns:mc="http://schemas.openxmlformats.org/markup-compatibility/2006" xmlns:p14="http://schemas.microsoft.com/office/powerpoint/2010/main">
+          <mc:Choice Requires="p14">
             <p:contentPart p14:bwMode="auto" r:id="rId24">
               <p14:nvContentPartPr>
                 <p14:cNvPr id="99" name="Ink 98">
@@ -11837,7 +11843,7 @@
               </p14:xfrm>
             </p:contentPart>
           </mc:Choice>
-          <mc:Fallback>
+          <mc:Fallback xmlns="">
             <p:pic>
               <p:nvPicPr>
                 <p:cNvPr id="99" name="Ink 98">
@@ -11869,8 +11875,8 @@
           </mc:Fallback>
         </mc:AlternateContent>
       </p:grpSp>
-      <mc:AlternateContent xmlns:mc="http://schemas.openxmlformats.org/markup-compatibility/2006">
-        <mc:Choice xmlns:p14="http://schemas.microsoft.com/office/powerpoint/2010/main" Requires="p14">
+      <mc:AlternateContent xmlns:mc="http://schemas.openxmlformats.org/markup-compatibility/2006" xmlns:p14="http://schemas.microsoft.com/office/powerpoint/2010/main">
+        <mc:Choice Requires="p14">
           <p:contentPart p14:bwMode="auto" r:id="rId26">
             <p14:nvContentPartPr>
               <p14:cNvPr id="101" name="Ink 100">
@@ -11889,7 +11895,7 @@
             </p14:xfrm>
           </p:contentPart>
         </mc:Choice>
-        <mc:Fallback>
+        <mc:Fallback xmlns="">
           <p:pic>
             <p:nvPicPr>
               <p:cNvPr id="101" name="Ink 100">
@@ -11920,8 +11926,8 @@
           </p:pic>
         </mc:Fallback>
       </mc:AlternateContent>
-      <mc:AlternateContent xmlns:mc="http://schemas.openxmlformats.org/markup-compatibility/2006">
-        <mc:Choice xmlns:p14="http://schemas.microsoft.com/office/powerpoint/2010/main" Requires="p14">
+      <mc:AlternateContent xmlns:mc="http://schemas.openxmlformats.org/markup-compatibility/2006" xmlns:p14="http://schemas.microsoft.com/office/powerpoint/2010/main">
+        <mc:Choice Requires="p14">
           <p:contentPart p14:bwMode="auto" r:id="rId28">
             <p14:nvContentPartPr>
               <p14:cNvPr id="103" name="Ink 102">
@@ -11940,7 +11946,7 @@
             </p14:xfrm>
           </p:contentPart>
         </mc:Choice>
-        <mc:Fallback>
+        <mc:Fallback xmlns="">
           <p:pic>
             <p:nvPicPr>
               <p:cNvPr id="103" name="Ink 102">
@@ -11991,8 +11997,8 @@
             <a:chExt cx="287640" cy="561240"/>
           </a:xfrm>
         </p:grpSpPr>
-        <mc:AlternateContent xmlns:mc="http://schemas.openxmlformats.org/markup-compatibility/2006">
-          <mc:Choice xmlns:p14="http://schemas.microsoft.com/office/powerpoint/2010/main" Requires="p14">
+        <mc:AlternateContent xmlns:mc="http://schemas.openxmlformats.org/markup-compatibility/2006" xmlns:p14="http://schemas.microsoft.com/office/powerpoint/2010/main">
+          <mc:Choice Requires="p14">
             <p:contentPart p14:bwMode="auto" r:id="rId30">
               <p14:nvContentPartPr>
                 <p14:cNvPr id="104" name="Ink 103">
@@ -12011,7 +12017,7 @@
               </p14:xfrm>
             </p:contentPart>
           </mc:Choice>
-          <mc:Fallback>
+          <mc:Fallback xmlns="">
             <p:pic>
               <p:nvPicPr>
                 <p:cNvPr id="104" name="Ink 103">
@@ -12042,8 +12048,8 @@
             </p:pic>
           </mc:Fallback>
         </mc:AlternateContent>
-        <mc:AlternateContent xmlns:mc="http://schemas.openxmlformats.org/markup-compatibility/2006">
-          <mc:Choice xmlns:p14="http://schemas.microsoft.com/office/powerpoint/2010/main" Requires="p14">
+        <mc:AlternateContent xmlns:mc="http://schemas.openxmlformats.org/markup-compatibility/2006" xmlns:p14="http://schemas.microsoft.com/office/powerpoint/2010/main">
+          <mc:Choice Requires="p14">
             <p:contentPart p14:bwMode="auto" r:id="rId32">
               <p14:nvContentPartPr>
                 <p14:cNvPr id="106" name="Ink 105">
@@ -12062,7 +12068,7 @@
               </p14:xfrm>
             </p:contentPart>
           </mc:Choice>
-          <mc:Fallback>
+          <mc:Fallback xmlns="">
             <p:pic>
               <p:nvPicPr>
                 <p:cNvPr id="106" name="Ink 105">
@@ -12906,6 +12912,1640 @@
     <p:extLst>
       <p:ext uri="{BB962C8B-B14F-4D97-AF65-F5344CB8AC3E}">
         <p14:creationId xmlns:p14="http://schemas.microsoft.com/office/powerpoint/2010/main" val="1858181243"/>
+      </p:ext>
+    </p:extLst>
+  </p:cSld>
+  <p:clrMapOvr>
+    <a:masterClrMapping/>
+  </p:clrMapOvr>
+</p:sld>
+</file>
+
+<file path=ppt/slides/slide27.xml><?xml version="1.0" encoding="utf-8"?>
+<p:sld xmlns:a="http://schemas.openxmlformats.org/drawingml/2006/main" xmlns:r="http://schemas.openxmlformats.org/officeDocument/2006/relationships" xmlns:p="http://schemas.openxmlformats.org/presentationml/2006/main">
+  <p:cSld>
+    <p:spTree>
+      <p:nvGrpSpPr>
+        <p:cNvPr id="1" name="">
+          <a:extLst>
+            <a:ext uri="{FF2B5EF4-FFF2-40B4-BE49-F238E27FC236}">
+              <a16:creationId xmlns:a16="http://schemas.microsoft.com/office/drawing/2014/main" id="{8D820270-0DD3-DBAF-469D-E8EA9019ED28}"/>
+            </a:ext>
+          </a:extLst>
+        </p:cNvPr>
+        <p:cNvGrpSpPr/>
+        <p:nvPr/>
+      </p:nvGrpSpPr>
+      <p:grpSpPr>
+        <a:xfrm>
+          <a:off x="0" y="0"/>
+          <a:ext cx="0" cy="0"/>
+          <a:chOff x="0" y="0"/>
+          <a:chExt cx="0" cy="0"/>
+        </a:xfrm>
+      </p:grpSpPr>
+      <p:pic>
+        <p:nvPicPr>
+          <p:cNvPr id="21" name="Picture 20">
+            <a:extLst>
+              <a:ext uri="{FF2B5EF4-FFF2-40B4-BE49-F238E27FC236}">
+                <a16:creationId xmlns:a16="http://schemas.microsoft.com/office/drawing/2014/main" id="{378FDF13-9E67-49CC-95D1-74F89ED11399}"/>
+              </a:ext>
+            </a:extLst>
+          </p:cNvPr>
+          <p:cNvPicPr>
+            <a:picLocks noChangeAspect="1"/>
+          </p:cNvPicPr>
+          <p:nvPr/>
+        </p:nvPicPr>
+        <p:blipFill>
+          <a:blip r:embed="rId2"/>
+          <a:stretch>
+            <a:fillRect/>
+          </a:stretch>
+        </p:blipFill>
+        <p:spPr>
+          <a:xfrm>
+            <a:off x="2302936" y="1209964"/>
+            <a:ext cx="7227479" cy="4257964"/>
+          </a:xfrm>
+          <a:prstGeom prst="rect">
+            <a:avLst/>
+          </a:prstGeom>
+        </p:spPr>
+      </p:pic>
+      <p:sp>
+        <p:nvSpPr>
+          <p:cNvPr id="6" name="Rectangle: Rounded Corners 5">
+            <a:extLst>
+              <a:ext uri="{FF2B5EF4-FFF2-40B4-BE49-F238E27FC236}">
+                <a16:creationId xmlns:a16="http://schemas.microsoft.com/office/drawing/2014/main" id="{FB9BF6B7-9EC8-61D1-17B7-5DC88BD0EA28}"/>
+              </a:ext>
+            </a:extLst>
+          </p:cNvPr>
+          <p:cNvSpPr/>
+          <p:nvPr/>
+        </p:nvSpPr>
+        <p:spPr>
+          <a:xfrm>
+            <a:off x="2922016" y="2111248"/>
+            <a:ext cx="5989320" cy="4495800"/>
+          </a:xfrm>
+          <a:prstGeom prst="roundRect">
+            <a:avLst>
+              <a:gd name="adj" fmla="val 5142"/>
+            </a:avLst>
+          </a:prstGeom>
+          <a:solidFill>
+            <a:srgbClr val="30264E"/>
+          </a:solidFill>
+          <a:ln>
+            <a:solidFill>
+              <a:schemeClr val="bg1"/>
+            </a:solidFill>
+          </a:ln>
+          <a:effectLst>
+            <a:glow rad="419100">
+              <a:srgbClr val="474E57">
+                <a:alpha val="29000"/>
+              </a:srgbClr>
+            </a:glow>
+            <a:outerShdw blurRad="50800" dist="50800" dir="5400000" algn="ctr" rotWithShape="0">
+              <a:srgbClr val="000000"/>
+            </a:outerShdw>
+            <a:reflection endPos="65000" dist="50800" dir="5400000" sy="-100000" algn="bl" rotWithShape="0"/>
+          </a:effectLst>
+        </p:spPr>
+        <p:style>
+          <a:lnRef idx="2">
+            <a:schemeClr val="accent1">
+              <a:shade val="15000"/>
+            </a:schemeClr>
+          </a:lnRef>
+          <a:fillRef idx="1">
+            <a:schemeClr val="accent1"/>
+          </a:fillRef>
+          <a:effectRef idx="0">
+            <a:schemeClr val="accent1"/>
+          </a:effectRef>
+          <a:fontRef idx="minor">
+            <a:schemeClr val="lt1"/>
+          </a:fontRef>
+        </p:style>
+        <p:txBody>
+          <a:bodyPr rtlCol="0" anchor="ctr"/>
+          <a:lstStyle/>
+          <a:p>
+            <a:pPr algn="ctr"/>
+            <a:endParaRPr lang="en-US" noProof="1"/>
+          </a:p>
+        </p:txBody>
+      </p:sp>
+      <p:sp>
+        <p:nvSpPr>
+          <p:cNvPr id="8" name="Rectangle: Rounded Corners 7">
+            <a:extLst>
+              <a:ext uri="{FF2B5EF4-FFF2-40B4-BE49-F238E27FC236}">
+                <a16:creationId xmlns:a16="http://schemas.microsoft.com/office/drawing/2014/main" id="{41847834-E28A-3BF7-1C23-90DF948B6D57}"/>
+              </a:ext>
+            </a:extLst>
+          </p:cNvPr>
+          <p:cNvSpPr/>
+          <p:nvPr/>
+        </p:nvSpPr>
+        <p:spPr>
+          <a:xfrm>
+            <a:off x="2998461" y="2580354"/>
+            <a:ext cx="5838213" cy="3021102"/>
+          </a:xfrm>
+          <a:prstGeom prst="roundRect">
+            <a:avLst>
+              <a:gd name="adj" fmla="val 3769"/>
+            </a:avLst>
+          </a:prstGeom>
+          <a:blipFill>
+            <a:blip r:embed="rId3"/>
+            <a:stretch>
+              <a:fillRect/>
+            </a:stretch>
+          </a:blipFill>
+          <a:ln>
+            <a:solidFill>
+              <a:schemeClr val="bg1"/>
+            </a:solidFill>
+          </a:ln>
+        </p:spPr>
+        <p:style>
+          <a:lnRef idx="2">
+            <a:schemeClr val="accent1">
+              <a:shade val="15000"/>
+            </a:schemeClr>
+          </a:lnRef>
+          <a:fillRef idx="1">
+            <a:schemeClr val="accent1"/>
+          </a:fillRef>
+          <a:effectRef idx="0">
+            <a:schemeClr val="accent1"/>
+          </a:effectRef>
+          <a:fontRef idx="minor">
+            <a:schemeClr val="lt1"/>
+          </a:fontRef>
+        </p:style>
+        <p:txBody>
+          <a:bodyPr rtlCol="0" anchor="ctr"/>
+          <a:lstStyle/>
+          <a:p>
+            <a:endParaRPr lang="en-US" sz="1050" noProof="1">
+              <a:latin typeface="Franklin Gothic Medium" panose="020B0603020102020204" pitchFamily="34" charset="0"/>
+            </a:endParaRPr>
+          </a:p>
+        </p:txBody>
+      </p:sp>
+      <p:sp>
+        <p:nvSpPr>
+          <p:cNvPr id="11" name="Rectangle: Rounded Corners 10">
+            <a:extLst>
+              <a:ext uri="{FF2B5EF4-FFF2-40B4-BE49-F238E27FC236}">
+                <a16:creationId xmlns:a16="http://schemas.microsoft.com/office/drawing/2014/main" id="{5AC6BFC4-ADC3-620D-9549-AE1AF328D58F}"/>
+              </a:ext>
+            </a:extLst>
+          </p:cNvPr>
+          <p:cNvSpPr/>
+          <p:nvPr/>
+        </p:nvSpPr>
+        <p:spPr>
+          <a:xfrm>
+            <a:off x="7686233" y="2204436"/>
+            <a:ext cx="1088788" cy="313210"/>
+          </a:xfrm>
+          <a:prstGeom prst="roundRect">
+            <a:avLst>
+              <a:gd name="adj" fmla="val 41970"/>
+            </a:avLst>
+          </a:prstGeom>
+          <a:solidFill>
+            <a:srgbClr val="30264E"/>
+          </a:solidFill>
+          <a:ln>
+            <a:solidFill>
+              <a:schemeClr val="bg1"/>
+            </a:solidFill>
+          </a:ln>
+        </p:spPr>
+        <p:style>
+          <a:lnRef idx="2">
+            <a:schemeClr val="accent1">
+              <a:shade val="15000"/>
+            </a:schemeClr>
+          </a:lnRef>
+          <a:fillRef idx="1">
+            <a:schemeClr val="accent1"/>
+          </a:fillRef>
+          <a:effectRef idx="0">
+            <a:schemeClr val="accent1"/>
+          </a:effectRef>
+          <a:fontRef idx="minor">
+            <a:schemeClr val="lt1"/>
+          </a:fontRef>
+        </p:style>
+        <p:txBody>
+          <a:bodyPr rtlCol="0" anchor="ctr"/>
+          <a:lstStyle/>
+          <a:p>
+            <a:pPr algn="ctr"/>
+            <a:endParaRPr lang="en-US" noProof="1"/>
+          </a:p>
+        </p:txBody>
+      </p:sp>
+      <p:sp>
+        <p:nvSpPr>
+          <p:cNvPr id="12" name="Rectangle 11">
+            <a:extLst>
+              <a:ext uri="{FF2B5EF4-FFF2-40B4-BE49-F238E27FC236}">
+                <a16:creationId xmlns:a16="http://schemas.microsoft.com/office/drawing/2014/main" id="{B318BEE3-D428-B65B-C021-09A7177CCAD4}"/>
+              </a:ext>
+            </a:extLst>
+          </p:cNvPr>
+          <p:cNvSpPr/>
+          <p:nvPr/>
+        </p:nvSpPr>
+        <p:spPr>
+          <a:xfrm>
+            <a:off x="8210330" y="2337963"/>
+            <a:ext cx="93583" cy="72351"/>
+          </a:xfrm>
+          <a:prstGeom prst="rect">
+            <a:avLst/>
+          </a:prstGeom>
+          <a:noFill/>
+          <a:ln>
+            <a:solidFill>
+              <a:schemeClr val="bg1"/>
+            </a:solidFill>
+          </a:ln>
+        </p:spPr>
+        <p:style>
+          <a:lnRef idx="2">
+            <a:schemeClr val="accent1">
+              <a:shade val="15000"/>
+            </a:schemeClr>
+          </a:lnRef>
+          <a:fillRef idx="1">
+            <a:schemeClr val="accent1"/>
+          </a:fillRef>
+          <a:effectRef idx="0">
+            <a:schemeClr val="accent1"/>
+          </a:effectRef>
+          <a:fontRef idx="minor">
+            <a:schemeClr val="lt1"/>
+          </a:fontRef>
+        </p:style>
+        <p:txBody>
+          <a:bodyPr rtlCol="0" anchor="ctr"/>
+          <a:lstStyle/>
+          <a:p>
+            <a:pPr algn="ctr"/>
+            <a:endParaRPr lang="en-US" noProof="1"/>
+          </a:p>
+        </p:txBody>
+      </p:sp>
+      <p:cxnSp>
+        <p:nvCxnSpPr>
+          <p:cNvPr id="13" name="Straight Connector 12">
+            <a:extLst>
+              <a:ext uri="{FF2B5EF4-FFF2-40B4-BE49-F238E27FC236}">
+                <a16:creationId xmlns:a16="http://schemas.microsoft.com/office/drawing/2014/main" id="{B39A8209-CD14-AF1F-A30B-7F2763A90581}"/>
+              </a:ext>
+            </a:extLst>
+          </p:cNvPr>
+          <p:cNvCxnSpPr>
+            <a:cxnSpLocks/>
+          </p:cNvCxnSpPr>
+          <p:nvPr/>
+        </p:nvCxnSpPr>
+        <p:spPr>
+          <a:xfrm flipH="1" flipV="1">
+            <a:off x="8533036" y="2311037"/>
+            <a:ext cx="103594" cy="101641"/>
+          </a:xfrm>
+          <a:prstGeom prst="line">
+            <a:avLst/>
+          </a:prstGeom>
+          <a:ln>
+            <a:solidFill>
+              <a:schemeClr val="bg1"/>
+            </a:solidFill>
+          </a:ln>
+        </p:spPr>
+        <p:style>
+          <a:lnRef idx="2">
+            <a:schemeClr val="accent1"/>
+          </a:lnRef>
+          <a:fillRef idx="0">
+            <a:schemeClr val="accent1"/>
+          </a:fillRef>
+          <a:effectRef idx="1">
+            <a:schemeClr val="accent1"/>
+          </a:effectRef>
+          <a:fontRef idx="minor">
+            <a:schemeClr val="tx1"/>
+          </a:fontRef>
+        </p:style>
+      </p:cxnSp>
+      <p:cxnSp>
+        <p:nvCxnSpPr>
+          <p:cNvPr id="14" name="Straight Connector 13">
+            <a:extLst>
+              <a:ext uri="{FF2B5EF4-FFF2-40B4-BE49-F238E27FC236}">
+                <a16:creationId xmlns:a16="http://schemas.microsoft.com/office/drawing/2014/main" id="{713222FB-9373-1FE1-F229-AC8D2D5200F5}"/>
+              </a:ext>
+            </a:extLst>
+          </p:cNvPr>
+          <p:cNvCxnSpPr>
+            <a:cxnSpLocks/>
+          </p:cNvCxnSpPr>
+          <p:nvPr/>
+        </p:nvCxnSpPr>
+        <p:spPr>
+          <a:xfrm>
+            <a:off x="7841446" y="2410314"/>
+            <a:ext cx="120711" cy="0"/>
+          </a:xfrm>
+          <a:prstGeom prst="line">
+            <a:avLst/>
+          </a:prstGeom>
+          <a:ln>
+            <a:solidFill>
+              <a:schemeClr val="bg1"/>
+            </a:solidFill>
+          </a:ln>
+        </p:spPr>
+        <p:style>
+          <a:lnRef idx="2">
+            <a:schemeClr val="accent1"/>
+          </a:lnRef>
+          <a:fillRef idx="0">
+            <a:schemeClr val="accent1"/>
+          </a:fillRef>
+          <a:effectRef idx="1">
+            <a:schemeClr val="accent1"/>
+          </a:effectRef>
+          <a:fontRef idx="minor">
+            <a:schemeClr val="tx1"/>
+          </a:fontRef>
+        </p:style>
+      </p:cxnSp>
+      <p:sp>
+        <p:nvSpPr>
+          <p:cNvPr id="15" name="Rectangle: Rounded Corners 14">
+            <a:extLst>
+              <a:ext uri="{FF2B5EF4-FFF2-40B4-BE49-F238E27FC236}">
+                <a16:creationId xmlns:a16="http://schemas.microsoft.com/office/drawing/2014/main" id="{714DBB3E-4473-B11F-A390-E08BD237C99E}"/>
+              </a:ext>
+            </a:extLst>
+          </p:cNvPr>
+          <p:cNvSpPr/>
+          <p:nvPr/>
+        </p:nvSpPr>
+        <p:spPr>
+          <a:xfrm>
+            <a:off x="3037905" y="2204833"/>
+            <a:ext cx="4574418" cy="313210"/>
+          </a:xfrm>
+          <a:prstGeom prst="roundRect">
+            <a:avLst>
+              <a:gd name="adj" fmla="val 41970"/>
+            </a:avLst>
+          </a:prstGeom>
+          <a:solidFill>
+            <a:srgbClr val="30264E"/>
+          </a:solidFill>
+          <a:ln>
+            <a:solidFill>
+              <a:schemeClr val="bg1"/>
+            </a:solidFill>
+          </a:ln>
+        </p:spPr>
+        <p:style>
+          <a:lnRef idx="2">
+            <a:schemeClr val="accent1">
+              <a:shade val="15000"/>
+            </a:schemeClr>
+          </a:lnRef>
+          <a:fillRef idx="1">
+            <a:schemeClr val="accent1"/>
+          </a:fillRef>
+          <a:effectRef idx="0">
+            <a:schemeClr val="accent1"/>
+          </a:effectRef>
+          <a:fontRef idx="minor">
+            <a:schemeClr val="lt1"/>
+          </a:fontRef>
+        </p:style>
+        <p:txBody>
+          <a:bodyPr rtlCol="0" anchor="ctr"/>
+          <a:lstStyle/>
+          <a:p>
+            <a:r>
+              <a:rPr lang="ro-RO" sz="1000" noProof="1"/>
+              <a:t>       Octoglow</a:t>
+            </a:r>
+            <a:endParaRPr lang="en-US" sz="1000" noProof="1"/>
+          </a:p>
+        </p:txBody>
+      </p:sp>
+      <p:cxnSp>
+        <p:nvCxnSpPr>
+          <p:cNvPr id="16" name="Straight Connector 15">
+            <a:extLst>
+              <a:ext uri="{FF2B5EF4-FFF2-40B4-BE49-F238E27FC236}">
+                <a16:creationId xmlns:a16="http://schemas.microsoft.com/office/drawing/2014/main" id="{547DF7CB-D44C-E278-86C6-8E855CBF498A}"/>
+              </a:ext>
+            </a:extLst>
+          </p:cNvPr>
+          <p:cNvCxnSpPr>
+            <a:cxnSpLocks/>
+          </p:cNvCxnSpPr>
+          <p:nvPr/>
+        </p:nvCxnSpPr>
+        <p:spPr>
+          <a:xfrm flipV="1">
+            <a:off x="8529166" y="2311037"/>
+            <a:ext cx="107464" cy="99377"/>
+          </a:xfrm>
+          <a:prstGeom prst="line">
+            <a:avLst/>
+          </a:prstGeom>
+          <a:ln>
+            <a:solidFill>
+              <a:schemeClr val="bg1"/>
+            </a:solidFill>
+          </a:ln>
+        </p:spPr>
+        <p:style>
+          <a:lnRef idx="2">
+            <a:schemeClr val="accent1"/>
+          </a:lnRef>
+          <a:fillRef idx="0">
+            <a:schemeClr val="accent1"/>
+          </a:fillRef>
+          <a:effectRef idx="1">
+            <a:schemeClr val="accent1"/>
+          </a:effectRef>
+          <a:fontRef idx="minor">
+            <a:schemeClr val="tx1"/>
+          </a:fontRef>
+        </p:style>
+      </p:cxnSp>
+      <p:pic>
+        <p:nvPicPr>
+          <p:cNvPr id="23" name="Graphic 22" descr="Gears with solid fill">
+            <a:extLst>
+              <a:ext uri="{FF2B5EF4-FFF2-40B4-BE49-F238E27FC236}">
+                <a16:creationId xmlns:a16="http://schemas.microsoft.com/office/drawing/2014/main" id="{B9113D23-683D-71EC-EA0B-EEF846718063}"/>
+              </a:ext>
+            </a:extLst>
+          </p:cNvPr>
+          <p:cNvPicPr>
+            <a:picLocks noChangeAspect="1"/>
+          </p:cNvPicPr>
+          <p:nvPr/>
+        </p:nvPicPr>
+        <p:blipFill>
+          <a:blip r:embed="rId4">
+            <a:extLst>
+              <a:ext uri="{96DAC541-7B7A-43D3-8B79-37D633B846F1}">
+                <asvg:svgBlip xmlns:asvg="http://schemas.microsoft.com/office/drawing/2016/SVG/main" r:embed="rId5"/>
+              </a:ext>
+            </a:extLst>
+          </a:blip>
+          <a:stretch>
+            <a:fillRect/>
+          </a:stretch>
+        </p:blipFill>
+        <p:spPr>
+          <a:xfrm rot="945155">
+            <a:off x="2214003" y="2772672"/>
+            <a:ext cx="1782625" cy="1782625"/>
+          </a:xfrm>
+          <a:prstGeom prst="rect">
+            <a:avLst/>
+          </a:prstGeom>
+        </p:spPr>
+      </p:pic>
+      <p:pic>
+        <p:nvPicPr>
+          <p:cNvPr id="24" name="Graphic 23" descr="Gears with solid fill">
+            <a:extLst>
+              <a:ext uri="{FF2B5EF4-FFF2-40B4-BE49-F238E27FC236}">
+                <a16:creationId xmlns:a16="http://schemas.microsoft.com/office/drawing/2014/main" id="{6A57A7B2-BACB-1BE4-9BFA-881EE1CC746C}"/>
+              </a:ext>
+            </a:extLst>
+          </p:cNvPr>
+          <p:cNvPicPr>
+            <a:picLocks noChangeAspect="1"/>
+          </p:cNvPicPr>
+          <p:nvPr/>
+        </p:nvPicPr>
+        <p:blipFill>
+          <a:blip r:embed="rId4">
+            <a:extLst>
+              <a:ext uri="{96DAC541-7B7A-43D3-8B79-37D633B846F1}">
+                <asvg:svgBlip xmlns:asvg="http://schemas.microsoft.com/office/drawing/2016/SVG/main" r:embed="rId5"/>
+              </a:ext>
+            </a:extLst>
+          </a:blip>
+          <a:stretch>
+            <a:fillRect/>
+          </a:stretch>
+        </p:blipFill>
+        <p:spPr>
+          <a:xfrm rot="5939807">
+            <a:off x="7978902" y="3741052"/>
+            <a:ext cx="1908119" cy="1908119"/>
+          </a:xfrm>
+          <a:prstGeom prst="rect">
+            <a:avLst/>
+          </a:prstGeom>
+        </p:spPr>
+      </p:pic>
+      <p:pic>
+        <p:nvPicPr>
+          <p:cNvPr id="26" name="Graphic 25">
+            <a:extLst>
+              <a:ext uri="{FF2B5EF4-FFF2-40B4-BE49-F238E27FC236}">
+                <a16:creationId xmlns:a16="http://schemas.microsoft.com/office/drawing/2014/main" id="{320CAFD1-54ED-90AD-D3A1-8E028301A31A}"/>
+              </a:ext>
+            </a:extLst>
+          </p:cNvPr>
+          <p:cNvPicPr>
+            <a:picLocks noChangeAspect="1"/>
+          </p:cNvPicPr>
+          <p:nvPr/>
+        </p:nvPicPr>
+        <p:blipFill>
+          <a:blip r:embed="rId6">
+            <a:extLst>
+              <a:ext uri="{96DAC541-7B7A-43D3-8B79-37D633B846F1}">
+                <asvg:svgBlip xmlns:asvg="http://schemas.microsoft.com/office/drawing/2016/SVG/main" r:embed="rId7"/>
+              </a:ext>
+            </a:extLst>
+          </a:blip>
+          <a:stretch>
+            <a:fillRect/>
+          </a:stretch>
+        </p:blipFill>
+        <p:spPr>
+          <a:xfrm>
+            <a:off x="3108354" y="2255877"/>
+            <a:ext cx="196821" cy="196821"/>
+          </a:xfrm>
+          <a:prstGeom prst="rect">
+            <a:avLst/>
+          </a:prstGeom>
+        </p:spPr>
+      </p:pic>
+      <p:pic>
+        <p:nvPicPr>
+          <p:cNvPr id="28" name="Graphic 27" descr="Stars with solid fill">
+            <a:extLst>
+              <a:ext uri="{FF2B5EF4-FFF2-40B4-BE49-F238E27FC236}">
+                <a16:creationId xmlns:a16="http://schemas.microsoft.com/office/drawing/2014/main" id="{FBB220BF-F051-929B-F373-B7325EEBB608}"/>
+              </a:ext>
+            </a:extLst>
+          </p:cNvPr>
+          <p:cNvPicPr>
+            <a:picLocks noChangeAspect="1"/>
+          </p:cNvPicPr>
+          <p:nvPr/>
+        </p:nvPicPr>
+        <p:blipFill>
+          <a:blip r:embed="rId8">
+            <a:extLst>
+              <a:ext uri="{96DAC541-7B7A-43D3-8B79-37D633B846F1}">
+                <asvg:svgBlip xmlns:asvg="http://schemas.microsoft.com/office/drawing/2016/SVG/main" r:embed="rId9"/>
+              </a:ext>
+            </a:extLst>
+          </a:blip>
+          <a:stretch>
+            <a:fillRect/>
+          </a:stretch>
+        </p:blipFill>
+        <p:spPr>
+          <a:xfrm rot="20207231">
+            <a:off x="3248508" y="5171214"/>
+            <a:ext cx="914400" cy="914400"/>
+          </a:xfrm>
+          <a:prstGeom prst="rect">
+            <a:avLst/>
+          </a:prstGeom>
+        </p:spPr>
+      </p:pic>
+      <p:pic>
+        <p:nvPicPr>
+          <p:cNvPr id="29" name="Graphic 28" descr="Stars with solid fill">
+            <a:extLst>
+              <a:ext uri="{FF2B5EF4-FFF2-40B4-BE49-F238E27FC236}">
+                <a16:creationId xmlns:a16="http://schemas.microsoft.com/office/drawing/2014/main" id="{39561192-C77D-C186-2433-2701A9DA6FFF}"/>
+              </a:ext>
+            </a:extLst>
+          </p:cNvPr>
+          <p:cNvPicPr>
+            <a:picLocks noChangeAspect="1"/>
+          </p:cNvPicPr>
+          <p:nvPr/>
+        </p:nvPicPr>
+        <p:blipFill>
+          <a:blip r:embed="rId8">
+            <a:extLst>
+              <a:ext uri="{96DAC541-7B7A-43D3-8B79-37D633B846F1}">
+                <asvg:svgBlip xmlns:asvg="http://schemas.microsoft.com/office/drawing/2016/SVG/main" r:embed="rId9"/>
+              </a:ext>
+            </a:extLst>
+          </a:blip>
+          <a:stretch>
+            <a:fillRect/>
+          </a:stretch>
+        </p:blipFill>
+        <p:spPr>
+          <a:xfrm>
+            <a:off x="8646442" y="2007274"/>
+            <a:ext cx="914400" cy="914400"/>
+          </a:xfrm>
+          <a:prstGeom prst="rect">
+            <a:avLst/>
+          </a:prstGeom>
+        </p:spPr>
+      </p:pic>
+      <p:sp>
+        <p:nvSpPr>
+          <p:cNvPr id="32" name="Freeform: Shape 31">
+            <a:extLst>
+              <a:ext uri="{FF2B5EF4-FFF2-40B4-BE49-F238E27FC236}">
+                <a16:creationId xmlns:a16="http://schemas.microsoft.com/office/drawing/2014/main" id="{5EF29AA8-DBF6-7CB3-7BCE-A3765D342B89}"/>
+              </a:ext>
+            </a:extLst>
+          </p:cNvPr>
+          <p:cNvSpPr/>
+          <p:nvPr/>
+        </p:nvSpPr>
+        <p:spPr>
+          <a:xfrm>
+            <a:off x="3270667" y="4449776"/>
+            <a:ext cx="382406" cy="380787"/>
+          </a:xfrm>
+          <a:custGeom>
+            <a:avLst/>
+            <a:gdLst>
+              <a:gd name="connsiteX0" fmla="*/ 373131 w 382406"/>
+              <a:gd name="connsiteY0" fmla="*/ 167640 h 380787"/>
+              <a:gd name="connsiteX1" fmla="*/ 380751 w 382406"/>
+              <a:gd name="connsiteY1" fmla="*/ 138113 h 380787"/>
+              <a:gd name="connsiteX2" fmla="*/ 355986 w 382406"/>
+              <a:gd name="connsiteY2" fmla="*/ 120968 h 380787"/>
+              <a:gd name="connsiteX3" fmla="*/ 268356 w 382406"/>
+              <a:gd name="connsiteY3" fmla="*/ 120968 h 380787"/>
+              <a:gd name="connsiteX4" fmla="*/ 243591 w 382406"/>
+              <a:gd name="connsiteY4" fmla="*/ 102870 h 380787"/>
+              <a:gd name="connsiteX5" fmla="*/ 215968 w 382406"/>
+              <a:gd name="connsiteY5" fmla="*/ 18097 h 380787"/>
+              <a:gd name="connsiteX6" fmla="*/ 191203 w 382406"/>
+              <a:gd name="connsiteY6" fmla="*/ 0 h 380787"/>
+              <a:gd name="connsiteX7" fmla="*/ 166438 w 382406"/>
+              <a:gd name="connsiteY7" fmla="*/ 18097 h 380787"/>
+              <a:gd name="connsiteX8" fmla="*/ 138816 w 382406"/>
+              <a:gd name="connsiteY8" fmla="*/ 102870 h 380787"/>
+              <a:gd name="connsiteX9" fmla="*/ 114051 w 382406"/>
+              <a:gd name="connsiteY9" fmla="*/ 120968 h 380787"/>
+              <a:gd name="connsiteX10" fmla="*/ 26421 w 382406"/>
+              <a:gd name="connsiteY10" fmla="*/ 120968 h 380787"/>
+              <a:gd name="connsiteX11" fmla="*/ 1656 w 382406"/>
+              <a:gd name="connsiteY11" fmla="*/ 138113 h 380787"/>
+              <a:gd name="connsiteX12" fmla="*/ 9276 w 382406"/>
+              <a:gd name="connsiteY12" fmla="*/ 167640 h 380787"/>
+              <a:gd name="connsiteX13" fmla="*/ 39756 w 382406"/>
+              <a:gd name="connsiteY13" fmla="*/ 195263 h 380787"/>
+              <a:gd name="connsiteX14" fmla="*/ 78808 w 382406"/>
+              <a:gd name="connsiteY14" fmla="*/ 229552 h 380787"/>
+              <a:gd name="connsiteX15" fmla="*/ 86428 w 382406"/>
+              <a:gd name="connsiteY15" fmla="*/ 241935 h 380787"/>
+              <a:gd name="connsiteX16" fmla="*/ 86428 w 382406"/>
+              <a:gd name="connsiteY16" fmla="*/ 257175 h 380787"/>
+              <a:gd name="connsiteX17" fmla="*/ 59758 w 382406"/>
+              <a:gd name="connsiteY17" fmla="*/ 346710 h 380787"/>
+              <a:gd name="connsiteX18" fmla="*/ 69283 w 382406"/>
+              <a:gd name="connsiteY18" fmla="*/ 375285 h 380787"/>
+              <a:gd name="connsiteX19" fmla="*/ 99763 w 382406"/>
+              <a:gd name="connsiteY19" fmla="*/ 376238 h 380787"/>
+              <a:gd name="connsiteX20" fmla="*/ 175963 w 382406"/>
+              <a:gd name="connsiteY20" fmla="*/ 322898 h 380787"/>
+              <a:gd name="connsiteX21" fmla="*/ 205491 w 382406"/>
+              <a:gd name="connsiteY21" fmla="*/ 322898 h 380787"/>
+              <a:gd name="connsiteX22" fmla="*/ 281691 w 382406"/>
+              <a:gd name="connsiteY22" fmla="*/ 376238 h 380787"/>
+              <a:gd name="connsiteX23" fmla="*/ 312171 w 382406"/>
+              <a:gd name="connsiteY23" fmla="*/ 375285 h 380787"/>
+              <a:gd name="connsiteX24" fmla="*/ 321696 w 382406"/>
+              <a:gd name="connsiteY24" fmla="*/ 346710 h 380787"/>
+              <a:gd name="connsiteX25" fmla="*/ 295978 w 382406"/>
+              <a:gd name="connsiteY25" fmla="*/ 257175 h 380787"/>
+              <a:gd name="connsiteX26" fmla="*/ 303598 w 382406"/>
+              <a:gd name="connsiteY26" fmla="*/ 229552 h 380787"/>
+              <a:gd name="connsiteX27" fmla="*/ 373131 w 382406"/>
+              <a:gd name="connsiteY27" fmla="*/ 167640 h 380787"/>
+            </a:gdLst>
+            <a:ahLst/>
+            <a:cxnLst>
+              <a:cxn ang="0">
+                <a:pos x="connsiteX0" y="connsiteY0"/>
+              </a:cxn>
+              <a:cxn ang="0">
+                <a:pos x="connsiteX1" y="connsiteY1"/>
+              </a:cxn>
+              <a:cxn ang="0">
+                <a:pos x="connsiteX2" y="connsiteY2"/>
+              </a:cxn>
+              <a:cxn ang="0">
+                <a:pos x="connsiteX3" y="connsiteY3"/>
+              </a:cxn>
+              <a:cxn ang="0">
+                <a:pos x="connsiteX4" y="connsiteY4"/>
+              </a:cxn>
+              <a:cxn ang="0">
+                <a:pos x="connsiteX5" y="connsiteY5"/>
+              </a:cxn>
+              <a:cxn ang="0">
+                <a:pos x="connsiteX6" y="connsiteY6"/>
+              </a:cxn>
+              <a:cxn ang="0">
+                <a:pos x="connsiteX7" y="connsiteY7"/>
+              </a:cxn>
+              <a:cxn ang="0">
+                <a:pos x="connsiteX8" y="connsiteY8"/>
+              </a:cxn>
+              <a:cxn ang="0">
+                <a:pos x="connsiteX9" y="connsiteY9"/>
+              </a:cxn>
+              <a:cxn ang="0">
+                <a:pos x="connsiteX10" y="connsiteY10"/>
+              </a:cxn>
+              <a:cxn ang="0">
+                <a:pos x="connsiteX11" y="connsiteY11"/>
+              </a:cxn>
+              <a:cxn ang="0">
+                <a:pos x="connsiteX12" y="connsiteY12"/>
+              </a:cxn>
+              <a:cxn ang="0">
+                <a:pos x="connsiteX13" y="connsiteY13"/>
+              </a:cxn>
+              <a:cxn ang="0">
+                <a:pos x="connsiteX14" y="connsiteY14"/>
+              </a:cxn>
+              <a:cxn ang="0">
+                <a:pos x="connsiteX15" y="connsiteY15"/>
+              </a:cxn>
+              <a:cxn ang="0">
+                <a:pos x="connsiteX16" y="connsiteY16"/>
+              </a:cxn>
+              <a:cxn ang="0">
+                <a:pos x="connsiteX17" y="connsiteY17"/>
+              </a:cxn>
+              <a:cxn ang="0">
+                <a:pos x="connsiteX18" y="connsiteY18"/>
+              </a:cxn>
+              <a:cxn ang="0">
+                <a:pos x="connsiteX19" y="connsiteY19"/>
+              </a:cxn>
+              <a:cxn ang="0">
+                <a:pos x="connsiteX20" y="connsiteY20"/>
+              </a:cxn>
+              <a:cxn ang="0">
+                <a:pos x="connsiteX21" y="connsiteY21"/>
+              </a:cxn>
+              <a:cxn ang="0">
+                <a:pos x="connsiteX22" y="connsiteY22"/>
+              </a:cxn>
+              <a:cxn ang="0">
+                <a:pos x="connsiteX23" y="connsiteY23"/>
+              </a:cxn>
+              <a:cxn ang="0">
+                <a:pos x="connsiteX24" y="connsiteY24"/>
+              </a:cxn>
+              <a:cxn ang="0">
+                <a:pos x="connsiteX25" y="connsiteY25"/>
+              </a:cxn>
+              <a:cxn ang="0">
+                <a:pos x="connsiteX26" y="connsiteY26"/>
+              </a:cxn>
+              <a:cxn ang="0">
+                <a:pos x="connsiteX27" y="connsiteY27"/>
+              </a:cxn>
+            </a:cxnLst>
+            <a:rect l="l" t="t" r="r" b="b"/>
+            <a:pathLst>
+              <a:path w="382406" h="380787">
+                <a:moveTo>
+                  <a:pt x="373131" y="167640"/>
+                </a:moveTo>
+                <a:cubicBezTo>
+                  <a:pt x="381703" y="160020"/>
+                  <a:pt x="384561" y="148590"/>
+                  <a:pt x="380751" y="138113"/>
+                </a:cubicBezTo>
+                <a:cubicBezTo>
+                  <a:pt x="376941" y="127635"/>
+                  <a:pt x="367416" y="120968"/>
+                  <a:pt x="355986" y="120968"/>
+                </a:cubicBezTo>
+                <a:lnTo>
+                  <a:pt x="268356" y="120968"/>
+                </a:lnTo>
+                <a:cubicBezTo>
+                  <a:pt x="256926" y="120968"/>
+                  <a:pt x="247401" y="113348"/>
+                  <a:pt x="243591" y="102870"/>
+                </a:cubicBezTo>
+                <a:lnTo>
+                  <a:pt x="215968" y="18097"/>
+                </a:lnTo>
+                <a:cubicBezTo>
+                  <a:pt x="212158" y="7620"/>
+                  <a:pt x="202633" y="0"/>
+                  <a:pt x="191203" y="0"/>
+                </a:cubicBezTo>
+                <a:cubicBezTo>
+                  <a:pt x="179773" y="0"/>
+                  <a:pt x="170248" y="7620"/>
+                  <a:pt x="166438" y="18097"/>
+                </a:cubicBezTo>
+                <a:lnTo>
+                  <a:pt x="138816" y="102870"/>
+                </a:lnTo>
+                <a:cubicBezTo>
+                  <a:pt x="135006" y="113348"/>
+                  <a:pt x="125481" y="120968"/>
+                  <a:pt x="114051" y="120968"/>
+                </a:cubicBezTo>
+                <a:lnTo>
+                  <a:pt x="26421" y="120968"/>
+                </a:lnTo>
+                <a:cubicBezTo>
+                  <a:pt x="15943" y="120968"/>
+                  <a:pt x="5466" y="127635"/>
+                  <a:pt x="1656" y="138113"/>
+                </a:cubicBezTo>
+                <a:cubicBezTo>
+                  <a:pt x="-2154" y="148590"/>
+                  <a:pt x="703" y="160020"/>
+                  <a:pt x="9276" y="167640"/>
+                </a:cubicBezTo>
+                <a:lnTo>
+                  <a:pt x="39756" y="195263"/>
+                </a:lnTo>
+                <a:lnTo>
+                  <a:pt x="78808" y="229552"/>
+                </a:lnTo>
+                <a:cubicBezTo>
+                  <a:pt x="82618" y="233363"/>
+                  <a:pt x="85476" y="237173"/>
+                  <a:pt x="86428" y="241935"/>
+                </a:cubicBezTo>
+                <a:cubicBezTo>
+                  <a:pt x="87381" y="246698"/>
+                  <a:pt x="87381" y="252413"/>
+                  <a:pt x="86428" y="257175"/>
+                </a:cubicBezTo>
+                <a:lnTo>
+                  <a:pt x="59758" y="346710"/>
+                </a:lnTo>
+                <a:cubicBezTo>
+                  <a:pt x="55948" y="357188"/>
+                  <a:pt x="59758" y="368618"/>
+                  <a:pt x="69283" y="375285"/>
+                </a:cubicBezTo>
+                <a:cubicBezTo>
+                  <a:pt x="77856" y="381953"/>
+                  <a:pt x="90238" y="381953"/>
+                  <a:pt x="99763" y="376238"/>
+                </a:cubicBezTo>
+                <a:lnTo>
+                  <a:pt x="175963" y="322898"/>
+                </a:lnTo>
+                <a:cubicBezTo>
+                  <a:pt x="184536" y="316230"/>
+                  <a:pt x="196918" y="316230"/>
+                  <a:pt x="205491" y="322898"/>
+                </a:cubicBezTo>
+                <a:lnTo>
+                  <a:pt x="281691" y="376238"/>
+                </a:lnTo>
+                <a:cubicBezTo>
+                  <a:pt x="291216" y="382905"/>
+                  <a:pt x="302646" y="381953"/>
+                  <a:pt x="312171" y="375285"/>
+                </a:cubicBezTo>
+                <a:cubicBezTo>
+                  <a:pt x="320743" y="368618"/>
+                  <a:pt x="324553" y="357188"/>
+                  <a:pt x="321696" y="346710"/>
+                </a:cubicBezTo>
+                <a:lnTo>
+                  <a:pt x="295978" y="257175"/>
+                </a:lnTo>
+                <a:cubicBezTo>
+                  <a:pt x="293121" y="247650"/>
+                  <a:pt x="295978" y="236220"/>
+                  <a:pt x="303598" y="229552"/>
+                </a:cubicBezTo>
+                <a:lnTo>
+                  <a:pt x="373131" y="167640"/>
+                </a:lnTo>
+                <a:close/>
+              </a:path>
+            </a:pathLst>
+          </a:custGeom>
+          <a:solidFill>
+            <a:srgbClr val="30264E"/>
+          </a:solidFill>
+          <a:ln w="9525" cap="flat">
+            <a:solidFill>
+              <a:schemeClr val="bg1"/>
+            </a:solidFill>
+            <a:prstDash val="solid"/>
+            <a:miter/>
+          </a:ln>
+        </p:spPr>
+        <p:txBody>
+          <a:bodyPr rtlCol="0" anchor="ctr"/>
+          <a:lstStyle/>
+          <a:p>
+            <a:endParaRPr lang="en-US"/>
+          </a:p>
+        </p:txBody>
+      </p:sp>
+      <p:sp>
+        <p:nvSpPr>
+          <p:cNvPr id="33" name="Freeform: Shape 32">
+            <a:extLst>
+              <a:ext uri="{FF2B5EF4-FFF2-40B4-BE49-F238E27FC236}">
+                <a16:creationId xmlns:a16="http://schemas.microsoft.com/office/drawing/2014/main" id="{E63945F4-91EB-7022-CE13-2A66F5CBCB05}"/>
+              </a:ext>
+            </a:extLst>
+          </p:cNvPr>
+          <p:cNvSpPr/>
+          <p:nvPr/>
+        </p:nvSpPr>
+        <p:spPr>
+          <a:xfrm>
+            <a:off x="8078846" y="4852301"/>
+            <a:ext cx="303561" cy="304323"/>
+          </a:xfrm>
+          <a:custGeom>
+            <a:avLst/>
+            <a:gdLst>
+              <a:gd name="connsiteX0" fmla="*/ 296561 w 303561"/>
+              <a:gd name="connsiteY0" fmla="*/ 134302 h 304323"/>
+              <a:gd name="connsiteX1" fmla="*/ 302276 w 303561"/>
+              <a:gd name="connsiteY1" fmla="*/ 111443 h 304323"/>
+              <a:gd name="connsiteX2" fmla="*/ 283226 w 303561"/>
+              <a:gd name="connsiteY2" fmla="*/ 97155 h 304323"/>
+              <a:gd name="connsiteX3" fmla="*/ 213693 w 303561"/>
+              <a:gd name="connsiteY3" fmla="*/ 97155 h 304323"/>
+              <a:gd name="connsiteX4" fmla="*/ 193691 w 303561"/>
+              <a:gd name="connsiteY4" fmla="*/ 82868 h 304323"/>
+              <a:gd name="connsiteX5" fmla="*/ 171783 w 303561"/>
+              <a:gd name="connsiteY5" fmla="*/ 14288 h 304323"/>
+              <a:gd name="connsiteX6" fmla="*/ 151781 w 303561"/>
+              <a:gd name="connsiteY6" fmla="*/ 0 h 304323"/>
+              <a:gd name="connsiteX7" fmla="*/ 131778 w 303561"/>
+              <a:gd name="connsiteY7" fmla="*/ 14288 h 304323"/>
+              <a:gd name="connsiteX8" fmla="*/ 109871 w 303561"/>
+              <a:gd name="connsiteY8" fmla="*/ 82868 h 304323"/>
+              <a:gd name="connsiteX9" fmla="*/ 89868 w 303561"/>
+              <a:gd name="connsiteY9" fmla="*/ 97155 h 304323"/>
+              <a:gd name="connsiteX10" fmla="*/ 20336 w 303561"/>
+              <a:gd name="connsiteY10" fmla="*/ 97155 h 304323"/>
+              <a:gd name="connsiteX11" fmla="*/ 1286 w 303561"/>
+              <a:gd name="connsiteY11" fmla="*/ 111443 h 304323"/>
+              <a:gd name="connsiteX12" fmla="*/ 7001 w 303561"/>
+              <a:gd name="connsiteY12" fmla="*/ 134302 h 304323"/>
+              <a:gd name="connsiteX13" fmla="*/ 31766 w 303561"/>
+              <a:gd name="connsiteY13" fmla="*/ 156210 h 304323"/>
+              <a:gd name="connsiteX14" fmla="*/ 63198 w 303561"/>
+              <a:gd name="connsiteY14" fmla="*/ 183833 h 304323"/>
+              <a:gd name="connsiteX15" fmla="*/ 69866 w 303561"/>
+              <a:gd name="connsiteY15" fmla="*/ 194310 h 304323"/>
+              <a:gd name="connsiteX16" fmla="*/ 69866 w 303561"/>
+              <a:gd name="connsiteY16" fmla="*/ 206693 h 304323"/>
+              <a:gd name="connsiteX17" fmla="*/ 47006 w 303561"/>
+              <a:gd name="connsiteY17" fmla="*/ 277178 h 304323"/>
+              <a:gd name="connsiteX18" fmla="*/ 54626 w 303561"/>
+              <a:gd name="connsiteY18" fmla="*/ 300038 h 304323"/>
+              <a:gd name="connsiteX19" fmla="*/ 78438 w 303561"/>
+              <a:gd name="connsiteY19" fmla="*/ 300038 h 304323"/>
+              <a:gd name="connsiteX20" fmla="*/ 139398 w 303561"/>
+              <a:gd name="connsiteY20" fmla="*/ 257175 h 304323"/>
+              <a:gd name="connsiteX21" fmla="*/ 163211 w 303561"/>
+              <a:gd name="connsiteY21" fmla="*/ 257175 h 304323"/>
+              <a:gd name="connsiteX22" fmla="*/ 224171 w 303561"/>
+              <a:gd name="connsiteY22" fmla="*/ 300038 h 304323"/>
+              <a:gd name="connsiteX23" fmla="*/ 248936 w 303561"/>
+              <a:gd name="connsiteY23" fmla="*/ 300038 h 304323"/>
+              <a:gd name="connsiteX24" fmla="*/ 256556 w 303561"/>
+              <a:gd name="connsiteY24" fmla="*/ 276225 h 304323"/>
+              <a:gd name="connsiteX25" fmla="*/ 235601 w 303561"/>
+              <a:gd name="connsiteY25" fmla="*/ 204788 h 304323"/>
+              <a:gd name="connsiteX26" fmla="*/ 242268 w 303561"/>
+              <a:gd name="connsiteY26" fmla="*/ 182880 h 304323"/>
+              <a:gd name="connsiteX27" fmla="*/ 296561 w 303561"/>
+              <a:gd name="connsiteY27" fmla="*/ 134302 h 304323"/>
+            </a:gdLst>
+            <a:ahLst/>
+            <a:cxnLst>
+              <a:cxn ang="0">
+                <a:pos x="connsiteX0" y="connsiteY0"/>
+              </a:cxn>
+              <a:cxn ang="0">
+                <a:pos x="connsiteX1" y="connsiteY1"/>
+              </a:cxn>
+              <a:cxn ang="0">
+                <a:pos x="connsiteX2" y="connsiteY2"/>
+              </a:cxn>
+              <a:cxn ang="0">
+                <a:pos x="connsiteX3" y="connsiteY3"/>
+              </a:cxn>
+              <a:cxn ang="0">
+                <a:pos x="connsiteX4" y="connsiteY4"/>
+              </a:cxn>
+              <a:cxn ang="0">
+                <a:pos x="connsiteX5" y="connsiteY5"/>
+              </a:cxn>
+              <a:cxn ang="0">
+                <a:pos x="connsiteX6" y="connsiteY6"/>
+              </a:cxn>
+              <a:cxn ang="0">
+                <a:pos x="connsiteX7" y="connsiteY7"/>
+              </a:cxn>
+              <a:cxn ang="0">
+                <a:pos x="connsiteX8" y="connsiteY8"/>
+              </a:cxn>
+              <a:cxn ang="0">
+                <a:pos x="connsiteX9" y="connsiteY9"/>
+              </a:cxn>
+              <a:cxn ang="0">
+                <a:pos x="connsiteX10" y="connsiteY10"/>
+              </a:cxn>
+              <a:cxn ang="0">
+                <a:pos x="connsiteX11" y="connsiteY11"/>
+              </a:cxn>
+              <a:cxn ang="0">
+                <a:pos x="connsiteX12" y="connsiteY12"/>
+              </a:cxn>
+              <a:cxn ang="0">
+                <a:pos x="connsiteX13" y="connsiteY13"/>
+              </a:cxn>
+              <a:cxn ang="0">
+                <a:pos x="connsiteX14" y="connsiteY14"/>
+              </a:cxn>
+              <a:cxn ang="0">
+                <a:pos x="connsiteX15" y="connsiteY15"/>
+              </a:cxn>
+              <a:cxn ang="0">
+                <a:pos x="connsiteX16" y="connsiteY16"/>
+              </a:cxn>
+              <a:cxn ang="0">
+                <a:pos x="connsiteX17" y="connsiteY17"/>
+              </a:cxn>
+              <a:cxn ang="0">
+                <a:pos x="connsiteX18" y="connsiteY18"/>
+              </a:cxn>
+              <a:cxn ang="0">
+                <a:pos x="connsiteX19" y="connsiteY19"/>
+              </a:cxn>
+              <a:cxn ang="0">
+                <a:pos x="connsiteX20" y="connsiteY20"/>
+              </a:cxn>
+              <a:cxn ang="0">
+                <a:pos x="connsiteX21" y="connsiteY21"/>
+              </a:cxn>
+              <a:cxn ang="0">
+                <a:pos x="connsiteX22" y="connsiteY22"/>
+              </a:cxn>
+              <a:cxn ang="0">
+                <a:pos x="connsiteX23" y="connsiteY23"/>
+              </a:cxn>
+              <a:cxn ang="0">
+                <a:pos x="connsiteX24" y="connsiteY24"/>
+              </a:cxn>
+              <a:cxn ang="0">
+                <a:pos x="connsiteX25" y="connsiteY25"/>
+              </a:cxn>
+              <a:cxn ang="0">
+                <a:pos x="connsiteX26" y="connsiteY26"/>
+              </a:cxn>
+              <a:cxn ang="0">
+                <a:pos x="connsiteX27" y="connsiteY27"/>
+              </a:cxn>
+            </a:cxnLst>
+            <a:rect l="l" t="t" r="r" b="b"/>
+            <a:pathLst>
+              <a:path w="303561" h="304323">
+                <a:moveTo>
+                  <a:pt x="296561" y="134302"/>
+                </a:moveTo>
+                <a:cubicBezTo>
+                  <a:pt x="303228" y="128588"/>
+                  <a:pt x="305133" y="119063"/>
+                  <a:pt x="302276" y="111443"/>
+                </a:cubicBezTo>
+                <a:cubicBezTo>
+                  <a:pt x="299418" y="102870"/>
+                  <a:pt x="291798" y="98107"/>
+                  <a:pt x="283226" y="97155"/>
+                </a:cubicBezTo>
+                <a:lnTo>
+                  <a:pt x="213693" y="97155"/>
+                </a:lnTo>
+                <a:cubicBezTo>
+                  <a:pt x="205121" y="97155"/>
+                  <a:pt x="196548" y="91440"/>
+                  <a:pt x="193691" y="82868"/>
+                </a:cubicBezTo>
+                <a:lnTo>
+                  <a:pt x="171783" y="14288"/>
+                </a:lnTo>
+                <a:cubicBezTo>
+                  <a:pt x="168926" y="5715"/>
+                  <a:pt x="161306" y="0"/>
+                  <a:pt x="151781" y="0"/>
+                </a:cubicBezTo>
+                <a:cubicBezTo>
+                  <a:pt x="143208" y="0"/>
+                  <a:pt x="134636" y="5715"/>
+                  <a:pt x="131778" y="14288"/>
+                </a:cubicBezTo>
+                <a:lnTo>
+                  <a:pt x="109871" y="82868"/>
+                </a:lnTo>
+                <a:cubicBezTo>
+                  <a:pt x="107013" y="91440"/>
+                  <a:pt x="99393" y="97155"/>
+                  <a:pt x="89868" y="97155"/>
+                </a:cubicBezTo>
+                <a:lnTo>
+                  <a:pt x="20336" y="97155"/>
+                </a:lnTo>
+                <a:cubicBezTo>
+                  <a:pt x="11763" y="97155"/>
+                  <a:pt x="4143" y="102870"/>
+                  <a:pt x="1286" y="111443"/>
+                </a:cubicBezTo>
+                <a:cubicBezTo>
+                  <a:pt x="-1572" y="120015"/>
+                  <a:pt x="333" y="128588"/>
+                  <a:pt x="7001" y="134302"/>
+                </a:cubicBezTo>
+                <a:lnTo>
+                  <a:pt x="31766" y="156210"/>
+                </a:lnTo>
+                <a:lnTo>
+                  <a:pt x="63198" y="183833"/>
+                </a:lnTo>
+                <a:cubicBezTo>
+                  <a:pt x="66056" y="186690"/>
+                  <a:pt x="67961" y="190500"/>
+                  <a:pt x="69866" y="194310"/>
+                </a:cubicBezTo>
+                <a:cubicBezTo>
+                  <a:pt x="70818" y="198120"/>
+                  <a:pt x="70818" y="201930"/>
+                  <a:pt x="69866" y="206693"/>
+                </a:cubicBezTo>
+                <a:lnTo>
+                  <a:pt x="47006" y="277178"/>
+                </a:lnTo>
+                <a:cubicBezTo>
+                  <a:pt x="44148" y="285750"/>
+                  <a:pt x="47006" y="295275"/>
+                  <a:pt x="54626" y="300038"/>
+                </a:cubicBezTo>
+                <a:cubicBezTo>
+                  <a:pt x="62246" y="305753"/>
+                  <a:pt x="71771" y="305753"/>
+                  <a:pt x="78438" y="300038"/>
+                </a:cubicBezTo>
+                <a:lnTo>
+                  <a:pt x="139398" y="257175"/>
+                </a:lnTo>
+                <a:cubicBezTo>
+                  <a:pt x="146066" y="252413"/>
+                  <a:pt x="155591" y="252413"/>
+                  <a:pt x="163211" y="257175"/>
+                </a:cubicBezTo>
+                <a:lnTo>
+                  <a:pt x="224171" y="300038"/>
+                </a:lnTo>
+                <a:cubicBezTo>
+                  <a:pt x="231791" y="305753"/>
+                  <a:pt x="241316" y="305753"/>
+                  <a:pt x="248936" y="300038"/>
+                </a:cubicBezTo>
+                <a:cubicBezTo>
+                  <a:pt x="256556" y="294323"/>
+                  <a:pt x="259413" y="284798"/>
+                  <a:pt x="256556" y="276225"/>
+                </a:cubicBezTo>
+                <a:lnTo>
+                  <a:pt x="235601" y="204788"/>
+                </a:lnTo>
+                <a:cubicBezTo>
+                  <a:pt x="233696" y="197168"/>
+                  <a:pt x="235601" y="188595"/>
+                  <a:pt x="242268" y="182880"/>
+                </a:cubicBezTo>
+                <a:lnTo>
+                  <a:pt x="296561" y="134302"/>
+                </a:lnTo>
+                <a:close/>
+              </a:path>
+            </a:pathLst>
+          </a:custGeom>
+          <a:solidFill>
+            <a:srgbClr val="30264E"/>
+          </a:solidFill>
+          <a:ln w="9525" cap="flat">
+            <a:solidFill>
+              <a:schemeClr val="bg1"/>
+            </a:solidFill>
+            <a:prstDash val="solid"/>
+            <a:miter/>
+          </a:ln>
+        </p:spPr>
+        <p:txBody>
+          <a:bodyPr rtlCol="0" anchor="ctr"/>
+          <a:lstStyle/>
+          <a:p>
+            <a:endParaRPr lang="en-US"/>
+          </a:p>
+        </p:txBody>
+      </p:sp>
+      <p:sp>
+        <p:nvSpPr>
+          <p:cNvPr id="34" name="Freeform: Shape 33">
+            <a:extLst>
+              <a:ext uri="{FF2B5EF4-FFF2-40B4-BE49-F238E27FC236}">
+                <a16:creationId xmlns:a16="http://schemas.microsoft.com/office/drawing/2014/main" id="{51EDD671-A9A5-B6C8-9485-F20DC912031F}"/>
+              </a:ext>
+            </a:extLst>
+          </p:cNvPr>
+          <p:cNvSpPr/>
+          <p:nvPr/>
+        </p:nvSpPr>
+        <p:spPr>
+          <a:xfrm>
+            <a:off x="3923264" y="4624654"/>
+            <a:ext cx="228155" cy="227647"/>
+          </a:xfrm>
+          <a:custGeom>
+            <a:avLst/>
+            <a:gdLst>
+              <a:gd name="connsiteX0" fmla="*/ 222663 w 228155"/>
+              <a:gd name="connsiteY0" fmla="*/ 100965 h 227647"/>
+              <a:gd name="connsiteX1" fmla="*/ 227425 w 228155"/>
+              <a:gd name="connsiteY1" fmla="*/ 83820 h 227647"/>
+              <a:gd name="connsiteX2" fmla="*/ 213138 w 228155"/>
+              <a:gd name="connsiteY2" fmla="*/ 73342 h 227647"/>
+              <a:gd name="connsiteX3" fmla="*/ 160750 w 228155"/>
+              <a:gd name="connsiteY3" fmla="*/ 73342 h 227647"/>
+              <a:gd name="connsiteX4" fmla="*/ 146463 w 228155"/>
+              <a:gd name="connsiteY4" fmla="*/ 62865 h 227647"/>
+              <a:gd name="connsiteX5" fmla="*/ 129317 w 228155"/>
+              <a:gd name="connsiteY5" fmla="*/ 11430 h 227647"/>
+              <a:gd name="connsiteX6" fmla="*/ 114078 w 228155"/>
+              <a:gd name="connsiteY6" fmla="*/ 0 h 227647"/>
+              <a:gd name="connsiteX7" fmla="*/ 98838 w 228155"/>
+              <a:gd name="connsiteY7" fmla="*/ 10477 h 227647"/>
+              <a:gd name="connsiteX8" fmla="*/ 81692 w 228155"/>
+              <a:gd name="connsiteY8" fmla="*/ 61913 h 227647"/>
+              <a:gd name="connsiteX9" fmla="*/ 67405 w 228155"/>
+              <a:gd name="connsiteY9" fmla="*/ 72390 h 227647"/>
+              <a:gd name="connsiteX10" fmla="*/ 15017 w 228155"/>
+              <a:gd name="connsiteY10" fmla="*/ 72390 h 227647"/>
+              <a:gd name="connsiteX11" fmla="*/ 730 w 228155"/>
+              <a:gd name="connsiteY11" fmla="*/ 82867 h 227647"/>
+              <a:gd name="connsiteX12" fmla="*/ 5492 w 228155"/>
+              <a:gd name="connsiteY12" fmla="*/ 100013 h 227647"/>
+              <a:gd name="connsiteX13" fmla="*/ 23590 w 228155"/>
+              <a:gd name="connsiteY13" fmla="*/ 116205 h 227647"/>
+              <a:gd name="connsiteX14" fmla="*/ 46450 w 228155"/>
+              <a:gd name="connsiteY14" fmla="*/ 137160 h 227647"/>
+              <a:gd name="connsiteX15" fmla="*/ 51213 w 228155"/>
+              <a:gd name="connsiteY15" fmla="*/ 144780 h 227647"/>
+              <a:gd name="connsiteX16" fmla="*/ 51213 w 228155"/>
+              <a:gd name="connsiteY16" fmla="*/ 153352 h 227647"/>
+              <a:gd name="connsiteX17" fmla="*/ 35020 w 228155"/>
+              <a:gd name="connsiteY17" fmla="*/ 207645 h 227647"/>
+              <a:gd name="connsiteX18" fmla="*/ 40735 w 228155"/>
+              <a:gd name="connsiteY18" fmla="*/ 224790 h 227647"/>
+              <a:gd name="connsiteX19" fmla="*/ 58833 w 228155"/>
+              <a:gd name="connsiteY19" fmla="*/ 224790 h 227647"/>
+              <a:gd name="connsiteX20" fmla="*/ 104553 w 228155"/>
+              <a:gd name="connsiteY20" fmla="*/ 192405 h 227647"/>
+              <a:gd name="connsiteX21" fmla="*/ 122650 w 228155"/>
+              <a:gd name="connsiteY21" fmla="*/ 192405 h 227647"/>
+              <a:gd name="connsiteX22" fmla="*/ 168370 w 228155"/>
+              <a:gd name="connsiteY22" fmla="*/ 224790 h 227647"/>
+              <a:gd name="connsiteX23" fmla="*/ 186467 w 228155"/>
+              <a:gd name="connsiteY23" fmla="*/ 224790 h 227647"/>
+              <a:gd name="connsiteX24" fmla="*/ 192183 w 228155"/>
+              <a:gd name="connsiteY24" fmla="*/ 207645 h 227647"/>
+              <a:gd name="connsiteX25" fmla="*/ 175990 w 228155"/>
+              <a:gd name="connsiteY25" fmla="*/ 153352 h 227647"/>
+              <a:gd name="connsiteX26" fmla="*/ 180753 w 228155"/>
+              <a:gd name="connsiteY26" fmla="*/ 137160 h 227647"/>
+              <a:gd name="connsiteX27" fmla="*/ 222663 w 228155"/>
+              <a:gd name="connsiteY27" fmla="*/ 100965 h 227647"/>
+            </a:gdLst>
+            <a:ahLst/>
+            <a:cxnLst>
+              <a:cxn ang="0">
+                <a:pos x="connsiteX0" y="connsiteY0"/>
+              </a:cxn>
+              <a:cxn ang="0">
+                <a:pos x="connsiteX1" y="connsiteY1"/>
+              </a:cxn>
+              <a:cxn ang="0">
+                <a:pos x="connsiteX2" y="connsiteY2"/>
+              </a:cxn>
+              <a:cxn ang="0">
+                <a:pos x="connsiteX3" y="connsiteY3"/>
+              </a:cxn>
+              <a:cxn ang="0">
+                <a:pos x="connsiteX4" y="connsiteY4"/>
+              </a:cxn>
+              <a:cxn ang="0">
+                <a:pos x="connsiteX5" y="connsiteY5"/>
+              </a:cxn>
+              <a:cxn ang="0">
+                <a:pos x="connsiteX6" y="connsiteY6"/>
+              </a:cxn>
+              <a:cxn ang="0">
+                <a:pos x="connsiteX7" y="connsiteY7"/>
+              </a:cxn>
+              <a:cxn ang="0">
+                <a:pos x="connsiteX8" y="connsiteY8"/>
+              </a:cxn>
+              <a:cxn ang="0">
+                <a:pos x="connsiteX9" y="connsiteY9"/>
+              </a:cxn>
+              <a:cxn ang="0">
+                <a:pos x="connsiteX10" y="connsiteY10"/>
+              </a:cxn>
+              <a:cxn ang="0">
+                <a:pos x="connsiteX11" y="connsiteY11"/>
+              </a:cxn>
+              <a:cxn ang="0">
+                <a:pos x="connsiteX12" y="connsiteY12"/>
+              </a:cxn>
+              <a:cxn ang="0">
+                <a:pos x="connsiteX13" y="connsiteY13"/>
+              </a:cxn>
+              <a:cxn ang="0">
+                <a:pos x="connsiteX14" y="connsiteY14"/>
+              </a:cxn>
+              <a:cxn ang="0">
+                <a:pos x="connsiteX15" y="connsiteY15"/>
+              </a:cxn>
+              <a:cxn ang="0">
+                <a:pos x="connsiteX16" y="connsiteY16"/>
+              </a:cxn>
+              <a:cxn ang="0">
+                <a:pos x="connsiteX17" y="connsiteY17"/>
+              </a:cxn>
+              <a:cxn ang="0">
+                <a:pos x="connsiteX18" y="connsiteY18"/>
+              </a:cxn>
+              <a:cxn ang="0">
+                <a:pos x="connsiteX19" y="connsiteY19"/>
+              </a:cxn>
+              <a:cxn ang="0">
+                <a:pos x="connsiteX20" y="connsiteY20"/>
+              </a:cxn>
+              <a:cxn ang="0">
+                <a:pos x="connsiteX21" y="connsiteY21"/>
+              </a:cxn>
+              <a:cxn ang="0">
+                <a:pos x="connsiteX22" y="connsiteY22"/>
+              </a:cxn>
+              <a:cxn ang="0">
+                <a:pos x="connsiteX23" y="connsiteY23"/>
+              </a:cxn>
+              <a:cxn ang="0">
+                <a:pos x="connsiteX24" y="connsiteY24"/>
+              </a:cxn>
+              <a:cxn ang="0">
+                <a:pos x="connsiteX25" y="connsiteY25"/>
+              </a:cxn>
+              <a:cxn ang="0">
+                <a:pos x="connsiteX26" y="connsiteY26"/>
+              </a:cxn>
+              <a:cxn ang="0">
+                <a:pos x="connsiteX27" y="connsiteY27"/>
+              </a:cxn>
+            </a:cxnLst>
+            <a:rect l="l" t="t" r="r" b="b"/>
+            <a:pathLst>
+              <a:path w="228155" h="227647">
+                <a:moveTo>
+                  <a:pt x="222663" y="100965"/>
+                </a:moveTo>
+                <a:cubicBezTo>
+                  <a:pt x="227425" y="96202"/>
+                  <a:pt x="229330" y="89535"/>
+                  <a:pt x="227425" y="83820"/>
+                </a:cubicBezTo>
+                <a:cubicBezTo>
+                  <a:pt x="225520" y="78105"/>
+                  <a:pt x="218853" y="73342"/>
+                  <a:pt x="213138" y="73342"/>
+                </a:cubicBezTo>
+                <a:lnTo>
+                  <a:pt x="160750" y="73342"/>
+                </a:lnTo>
+                <a:cubicBezTo>
+                  <a:pt x="154083" y="73342"/>
+                  <a:pt x="148367" y="68580"/>
+                  <a:pt x="146463" y="62865"/>
+                </a:cubicBezTo>
+                <a:lnTo>
+                  <a:pt x="129317" y="11430"/>
+                </a:lnTo>
+                <a:cubicBezTo>
+                  <a:pt x="126460" y="4763"/>
+                  <a:pt x="120745" y="0"/>
+                  <a:pt x="114078" y="0"/>
+                </a:cubicBezTo>
+                <a:cubicBezTo>
+                  <a:pt x="107410" y="0"/>
+                  <a:pt x="101695" y="4763"/>
+                  <a:pt x="98838" y="10477"/>
+                </a:cubicBezTo>
+                <a:lnTo>
+                  <a:pt x="81692" y="61913"/>
+                </a:lnTo>
+                <a:cubicBezTo>
+                  <a:pt x="79788" y="68580"/>
+                  <a:pt x="74073" y="72390"/>
+                  <a:pt x="67405" y="72390"/>
+                </a:cubicBezTo>
+                <a:lnTo>
+                  <a:pt x="15017" y="72390"/>
+                </a:lnTo>
+                <a:cubicBezTo>
+                  <a:pt x="8350" y="72390"/>
+                  <a:pt x="2635" y="76200"/>
+                  <a:pt x="730" y="82867"/>
+                </a:cubicBezTo>
+                <a:cubicBezTo>
+                  <a:pt x="-1175" y="88583"/>
+                  <a:pt x="730" y="96202"/>
+                  <a:pt x="5492" y="100013"/>
+                </a:cubicBezTo>
+                <a:lnTo>
+                  <a:pt x="23590" y="116205"/>
+                </a:lnTo>
+                <a:lnTo>
+                  <a:pt x="46450" y="137160"/>
+                </a:lnTo>
+                <a:cubicBezTo>
+                  <a:pt x="48355" y="139065"/>
+                  <a:pt x="50260" y="141923"/>
+                  <a:pt x="51213" y="144780"/>
+                </a:cubicBezTo>
+                <a:cubicBezTo>
+                  <a:pt x="52165" y="147638"/>
+                  <a:pt x="52165" y="150495"/>
+                  <a:pt x="51213" y="153352"/>
+                </a:cubicBezTo>
+                <a:lnTo>
+                  <a:pt x="35020" y="207645"/>
+                </a:lnTo>
+                <a:cubicBezTo>
+                  <a:pt x="33115" y="214313"/>
+                  <a:pt x="35020" y="220980"/>
+                  <a:pt x="40735" y="224790"/>
+                </a:cubicBezTo>
+                <a:cubicBezTo>
+                  <a:pt x="46450" y="228600"/>
+                  <a:pt x="53117" y="228600"/>
+                  <a:pt x="58833" y="224790"/>
+                </a:cubicBezTo>
+                <a:lnTo>
+                  <a:pt x="104553" y="192405"/>
+                </a:lnTo>
+                <a:cubicBezTo>
+                  <a:pt x="110267" y="188595"/>
+                  <a:pt x="116935" y="188595"/>
+                  <a:pt x="122650" y="192405"/>
+                </a:cubicBezTo>
+                <a:lnTo>
+                  <a:pt x="168370" y="224790"/>
+                </a:lnTo>
+                <a:cubicBezTo>
+                  <a:pt x="174085" y="228600"/>
+                  <a:pt x="180753" y="228600"/>
+                  <a:pt x="186467" y="224790"/>
+                </a:cubicBezTo>
+                <a:cubicBezTo>
+                  <a:pt x="192183" y="220980"/>
+                  <a:pt x="194088" y="213360"/>
+                  <a:pt x="192183" y="207645"/>
+                </a:cubicBezTo>
+                <a:lnTo>
+                  <a:pt x="175990" y="153352"/>
+                </a:lnTo>
+                <a:cubicBezTo>
+                  <a:pt x="174085" y="147638"/>
+                  <a:pt x="175990" y="140970"/>
+                  <a:pt x="180753" y="137160"/>
+                </a:cubicBezTo>
+                <a:lnTo>
+                  <a:pt x="222663" y="100965"/>
+                </a:lnTo>
+                <a:close/>
+              </a:path>
+            </a:pathLst>
+          </a:custGeom>
+          <a:solidFill>
+            <a:srgbClr val="30264E"/>
+          </a:solidFill>
+          <a:ln w="9525" cap="flat">
+            <a:solidFill>
+              <a:schemeClr val="bg1"/>
+            </a:solidFill>
+            <a:prstDash val="solid"/>
+            <a:miter/>
+          </a:ln>
+        </p:spPr>
+        <p:txBody>
+          <a:bodyPr rtlCol="0" anchor="ctr"/>
+          <a:lstStyle/>
+          <a:p>
+            <a:endParaRPr lang="en-US"/>
+          </a:p>
+        </p:txBody>
+      </p:sp>
+      <p:pic>
+        <p:nvPicPr>
+          <p:cNvPr id="1026" name="Picture 2">
+            <a:extLst>
+              <a:ext uri="{FF2B5EF4-FFF2-40B4-BE49-F238E27FC236}">
+                <a16:creationId xmlns:a16="http://schemas.microsoft.com/office/drawing/2014/main" id="{5AB8B2EA-0326-379F-B3A5-93EFDB6FF9E8}"/>
+              </a:ext>
+            </a:extLst>
+          </p:cNvPr>
+          <p:cNvPicPr>
+            <a:picLocks noChangeAspect="1" noChangeArrowheads="1"/>
+          </p:cNvPicPr>
+          <p:nvPr/>
+        </p:nvPicPr>
+        <p:blipFill>
+          <a:blip r:embed="rId10">
+            <a:extLst>
+              <a:ext uri="{28A0092B-C50C-407E-A947-70E740481C1C}">
+                <a14:useLocalDpi xmlns:a14="http://schemas.microsoft.com/office/drawing/2010/main" val="0"/>
+              </a:ext>
+            </a:extLst>
+          </a:blip>
+          <a:srcRect/>
+          <a:stretch>
+            <a:fillRect/>
+          </a:stretch>
+        </p:blipFill>
+        <p:spPr bwMode="auto">
+          <a:xfrm>
+            <a:off x="3270667" y="1269801"/>
+            <a:ext cx="5516880" cy="887617"/>
+          </a:xfrm>
+          <a:prstGeom prst="rect">
+            <a:avLst/>
+          </a:prstGeom>
+          <a:noFill/>
+          <a:extLst>
+            <a:ext uri="{909E8E84-426E-40DD-AFC4-6F175D3DCCD1}">
+              <a14:hiddenFill xmlns:a14="http://schemas.microsoft.com/office/drawing/2010/main">
+                <a:solidFill>
+                  <a:srgbClr val="FFFFFF"/>
+                </a:solidFill>
+              </a14:hiddenFill>
+            </a:ext>
+          </a:extLst>
+        </p:spPr>
+      </p:pic>
+    </p:spTree>
+    <p:extLst>
+      <p:ext uri="{BB962C8B-B14F-4D97-AF65-F5344CB8AC3E}">
+        <p14:creationId xmlns:p14="http://schemas.microsoft.com/office/powerpoint/2010/main" val="1395255071"/>
       </p:ext>
     </p:extLst>
   </p:cSld>
